--- a/templates/office/Phase0_사업제안서_표준템플릿.pptx
+++ b/templates/office/Phase0_사업제안서_표준템플릿.pptx
@@ -3181,7 +3181,7 @@
               </a:defRPr>
             </a:pPr>
             <a:r>
-              <a:t>[프로젝트명] 기술 제안서</a:t>
+              <a:t>한빛글로벌 SyncGuard AI 구축 기술 제안서</a:t>
             </a:r>
           </a:p>
           <a:p>
@@ -3197,7 +3197,7 @@
               </a:defRPr>
             </a:pPr>
             <a:r>
-              <a:t>AI 에이전트 자율 운영 기반 엔터프라이즈 시스템 구축 방안</a:t>
+              <a:t>멀티모달 OCR 및 3단계 하이브리드 RAG 기반 표시·광고 심의 자동화 시스템 구축 방안</a:t>
             </a:r>
           </a:p>
           <a:p>
@@ -4191,7 +4191,7 @@
                           </a:solidFill>
                           <a:latin typeface="Malgun Gothic"/>
                         </a:rPr>
-                        <a:t>[홍길동 수석]</a:t>
+                        <a:t>박진우 수석</a:t>
                       </a:r>
                     </a:p>
                   </a:txBody>
@@ -4303,7 +4303,7 @@
                           </a:solidFill>
                           <a:latin typeface="Malgun Gothic"/>
                         </a:rPr>
-                        <a:t>[이몽룡 수석]</a:t>
+                        <a:t>강동현 수석</a:t>
                       </a:r>
                     </a:p>
                   </a:txBody>
@@ -4415,7 +4415,7 @@
                           </a:solidFill>
                           <a:latin typeface="Malgun Gothic"/>
                         </a:rPr>
-                        <a:t>[성춘향 책임]</a:t>
+                        <a:t>김태호 책임</a:t>
                       </a:r>
                     </a:p>
                   </a:txBody>
@@ -4527,7 +4527,7 @@
                           </a:solidFill>
                           <a:latin typeface="Malgun Gothic"/>
                         </a:rPr>
-                        <a:t>[변학도 책임]</a:t>
+                        <a:t>이하은 책임</a:t>
                       </a:r>
                     </a:p>
                   </a:txBody>
@@ -4639,7 +4639,7 @@
                           </a:solidFill>
                           <a:latin typeface="Malgun Gothic"/>
                         </a:rPr>
-                        <a:t>[임꺽정 선임]</a:t>
+                        <a:t>조현우 선임</a:t>
                       </a:r>
                     </a:p>
                   </a:txBody>

--- a/templates/office/Phase0_사업제안서_표준템플릿.pptx
+++ b/templates/office/Phase0_사업제안서_표준템플릿.pptx
@@ -3106,7 +3106,7 @@
             <a:avLst/>
           </a:prstGeom>
           <a:solidFill>
-            <a:srgbClr val="1E293B"/>
+            <a:srgbClr val="0F2942"/>
           </a:solidFill>
           <a:ln>
             <a:noFill/>
@@ -3181,7 +3181,7 @@
               </a:defRPr>
             </a:pPr>
             <a:r>
-              <a:t>한빛글로벌 SyncGuard AI 구축 기술 제안서</a:t>
+              <a:t>한빛글로벌 SyncFlow AI 구축 기술 제안서</a:t>
             </a:r>
           </a:p>
           <a:p>
@@ -3197,7 +3197,7 @@
               </a:defRPr>
             </a:pPr>
             <a:r>
-              <a:t>멀티모달 OCR 및 3단계 하이브리드 RAG 기반 표시·광고 심의 자동화 시스템 구축 방안</a:t>
+              <a:t>멀티모달 OCR 및 3단계 하이브리드 RAG 기반 계약·기술규격 검증 자동화 시스템 구축 방안</a:t>
             </a:r>
           </a:p>
           <a:p>
@@ -3306,7 +3306,7 @@
             <a:pPr>
               <a:defRPr sz="2200" b="1">
                 <a:solidFill>
-                  <a:srgbClr val="1E293B"/>
+                  <a:srgbClr val="0F2942"/>
                 </a:solidFill>
                 <a:latin typeface="Malgun Gothic"/>
               </a:defRPr>
@@ -3348,7 +3348,7 @@
               </a:spcAft>
               <a:defRPr sz="1400">
                 <a:solidFill>
-                  <a:srgbClr val="334155"/>
+                  <a:srgbClr val="1E3A5F"/>
                 </a:solidFill>
                 <a:latin typeface="Malgun Gothic"/>
               </a:defRPr>
@@ -3367,7 +3367,7 @@
               </a:spcAft>
               <a:defRPr sz="1400">
                 <a:solidFill>
-                  <a:srgbClr val="334155"/>
+                  <a:srgbClr val="1E3A5F"/>
                 </a:solidFill>
                 <a:latin typeface="Malgun Gothic"/>
               </a:defRPr>
@@ -3386,7 +3386,7 @@
               </a:spcAft>
               <a:defRPr sz="1400">
                 <a:solidFill>
-                  <a:srgbClr val="334155"/>
+                  <a:srgbClr val="1E3A5F"/>
                 </a:solidFill>
                 <a:latin typeface="Malgun Gothic"/>
               </a:defRPr>
@@ -3405,7 +3405,7 @@
               </a:spcAft>
               <a:defRPr sz="1400">
                 <a:solidFill>
-                  <a:srgbClr val="334155"/>
+                  <a:srgbClr val="1E3A5F"/>
                 </a:solidFill>
                 <a:latin typeface="Malgun Gothic"/>
               </a:defRPr>
@@ -3424,7 +3424,7 @@
               </a:spcAft>
               <a:defRPr sz="1400">
                 <a:solidFill>
-                  <a:srgbClr val="334155"/>
+                  <a:srgbClr val="1E3A5F"/>
                 </a:solidFill>
                 <a:latin typeface="Malgun Gothic"/>
               </a:defRPr>
@@ -3443,7 +3443,7 @@
               </a:spcAft>
               <a:defRPr sz="1400">
                 <a:solidFill>
-                  <a:srgbClr val="334155"/>
+                  <a:srgbClr val="1E3A5F"/>
                 </a:solidFill>
                 <a:latin typeface="Malgun Gothic"/>
               </a:defRPr>
@@ -3542,7 +3542,7 @@
             <a:pPr>
               <a:defRPr sz="2200" b="1">
                 <a:solidFill>
-                  <a:srgbClr val="1E293B"/>
+                  <a:srgbClr val="0F2942"/>
                 </a:solidFill>
                 <a:latin typeface="Malgun Gothic"/>
               </a:defRPr>
@@ -3595,7 +3595,7 @@
                   </a:txBody>
                   <a:tcPr>
                     <a:solidFill>
-                      <a:srgbClr val="1E293B"/>
+                      <a:srgbClr val="0F2942"/>
                     </a:solidFill>
                   </a:tcPr>
                 </a:tc>
@@ -3617,7 +3617,7 @@
                   </a:txBody>
                   <a:tcPr>
                     <a:solidFill>
-                      <a:srgbClr val="1E293B"/>
+                      <a:srgbClr val="0F2942"/>
                     </a:solidFill>
                   </a:tcPr>
                 </a:tc>
@@ -3639,7 +3639,7 @@
                   </a:txBody>
                   <a:tcPr>
                     <a:solidFill>
-                      <a:srgbClr val="1E293B"/>
+                      <a:srgbClr val="0F2942"/>
                     </a:solidFill>
                   </a:tcPr>
                 </a:tc>
@@ -3653,7 +3653,7 @@
                       <a:r>
                         <a:rPr sz="1100">
                           <a:solidFill>
-                            <a:srgbClr val="334155"/>
+                            <a:srgbClr val="1E3A5F"/>
                           </a:solidFill>
                           <a:latin typeface="Malgun Gothic"/>
                         </a:rPr>
@@ -3675,7 +3675,7 @@
                       <a:r>
                         <a:rPr sz="1100">
                           <a:solidFill>
-                            <a:srgbClr val="334155"/>
+                            <a:srgbClr val="1E3A5F"/>
                           </a:solidFill>
                           <a:latin typeface="Malgun Gothic"/>
                         </a:rPr>
@@ -3697,7 +3697,7 @@
                       <a:r>
                         <a:rPr sz="1100">
                           <a:solidFill>
-                            <a:srgbClr val="334155"/>
+                            <a:srgbClr val="1E3A5F"/>
                           </a:solidFill>
                           <a:latin typeface="Malgun Gothic"/>
                         </a:rPr>
@@ -3721,7 +3721,7 @@
                       <a:r>
                         <a:rPr sz="1100">
                           <a:solidFill>
-                            <a:srgbClr val="334155"/>
+                            <a:srgbClr val="1E3A5F"/>
                           </a:solidFill>
                           <a:latin typeface="Malgun Gothic"/>
                         </a:rPr>
@@ -3743,7 +3743,7 @@
                       <a:r>
                         <a:rPr sz="1100">
                           <a:solidFill>
-                            <a:srgbClr val="334155"/>
+                            <a:srgbClr val="1E3A5F"/>
                           </a:solidFill>
                           <a:latin typeface="Malgun Gothic"/>
                         </a:rPr>
@@ -3765,7 +3765,7 @@
                       <a:r>
                         <a:rPr sz="1100">
                           <a:solidFill>
-                            <a:srgbClr val="334155"/>
+                            <a:srgbClr val="1E3A5F"/>
                           </a:solidFill>
                           <a:latin typeface="Malgun Gothic"/>
                         </a:rPr>
@@ -3789,7 +3789,7 @@
                       <a:r>
                         <a:rPr sz="1100">
                           <a:solidFill>
-                            <a:srgbClr val="334155"/>
+                            <a:srgbClr val="1E3A5F"/>
                           </a:solidFill>
                           <a:latin typeface="Malgun Gothic"/>
                         </a:rPr>
@@ -3811,7 +3811,7 @@
                       <a:r>
                         <a:rPr sz="1100">
                           <a:solidFill>
-                            <a:srgbClr val="334155"/>
+                            <a:srgbClr val="1E3A5F"/>
                           </a:solidFill>
                           <a:latin typeface="Malgun Gothic"/>
                         </a:rPr>
@@ -3833,7 +3833,7 @@
                       <a:r>
                         <a:rPr sz="1100">
                           <a:solidFill>
-                            <a:srgbClr val="334155"/>
+                            <a:srgbClr val="1E3A5F"/>
                           </a:solidFill>
                           <a:latin typeface="Malgun Gothic"/>
                         </a:rPr>
@@ -3857,7 +3857,7 @@
                       <a:r>
                         <a:rPr sz="1100">
                           <a:solidFill>
-                            <a:srgbClr val="334155"/>
+                            <a:srgbClr val="1E3A5F"/>
                           </a:solidFill>
                           <a:latin typeface="Malgun Gothic"/>
                         </a:rPr>
@@ -3879,7 +3879,7 @@
                       <a:r>
                         <a:rPr sz="1100">
                           <a:solidFill>
-                            <a:srgbClr val="334155"/>
+                            <a:srgbClr val="1E3A5F"/>
                           </a:solidFill>
                           <a:latin typeface="Malgun Gothic"/>
                         </a:rPr>
@@ -3901,7 +3901,7 @@
                       <a:r>
                         <a:rPr sz="1100">
                           <a:solidFill>
-                            <a:srgbClr val="334155"/>
+                            <a:srgbClr val="1E3A5F"/>
                           </a:solidFill>
                           <a:latin typeface="Malgun Gothic"/>
                         </a:rPr>
@@ -4008,7 +4008,7 @@
             <a:pPr>
               <a:defRPr sz="2200" b="1">
                 <a:solidFill>
-                  <a:srgbClr val="1E293B"/>
+                  <a:srgbClr val="0F2942"/>
                 </a:solidFill>
                 <a:latin typeface="Malgun Gothic"/>
               </a:defRPr>
@@ -4063,7 +4063,7 @@
                   </a:txBody>
                   <a:tcPr>
                     <a:solidFill>
-                      <a:srgbClr val="1E293B"/>
+                      <a:srgbClr val="0F2942"/>
                     </a:solidFill>
                   </a:tcPr>
                 </a:tc>
@@ -4085,7 +4085,7 @@
                   </a:txBody>
                   <a:tcPr>
                     <a:solidFill>
-                      <a:srgbClr val="1E293B"/>
+                      <a:srgbClr val="0F2942"/>
                     </a:solidFill>
                   </a:tcPr>
                 </a:tc>
@@ -4107,7 +4107,7 @@
                   </a:txBody>
                   <a:tcPr>
                     <a:solidFill>
-                      <a:srgbClr val="1E293B"/>
+                      <a:srgbClr val="0F2942"/>
                     </a:solidFill>
                   </a:tcPr>
                 </a:tc>
@@ -4129,7 +4129,7 @@
                   </a:txBody>
                   <a:tcPr>
                     <a:solidFill>
-                      <a:srgbClr val="1E293B"/>
+                      <a:srgbClr val="0F2942"/>
                     </a:solidFill>
                   </a:tcPr>
                 </a:tc>
@@ -4151,7 +4151,7 @@
                   </a:txBody>
                   <a:tcPr>
                     <a:solidFill>
-                      <a:srgbClr val="1E293B"/>
+                      <a:srgbClr val="0F2942"/>
                     </a:solidFill>
                   </a:tcPr>
                 </a:tc>
@@ -4165,7 +4165,7 @@
                       <a:r>
                         <a:rPr sz="1100">
                           <a:solidFill>
-                            <a:srgbClr val="334155"/>
+                            <a:srgbClr val="1E3A5F"/>
                           </a:solidFill>
                           <a:latin typeface="Malgun Gothic"/>
                         </a:rPr>
@@ -4187,7 +4187,7 @@
                       <a:r>
                         <a:rPr sz="1100">
                           <a:solidFill>
-                            <a:srgbClr val="334155"/>
+                            <a:srgbClr val="1E3A5F"/>
                           </a:solidFill>
                           <a:latin typeface="Malgun Gothic"/>
                         </a:rPr>
@@ -4209,7 +4209,7 @@
                       <a:r>
                         <a:rPr sz="1100">
                           <a:solidFill>
-                            <a:srgbClr val="334155"/>
+                            <a:srgbClr val="1E3A5F"/>
                           </a:solidFill>
                           <a:latin typeface="Malgun Gothic"/>
                         </a:rPr>
@@ -4231,7 +4231,7 @@
                       <a:r>
                         <a:rPr sz="1100">
                           <a:solidFill>
-                            <a:srgbClr val="334155"/>
+                            <a:srgbClr val="1E3A5F"/>
                           </a:solidFill>
                           <a:latin typeface="Malgun Gothic"/>
                         </a:rPr>
@@ -4253,7 +4253,7 @@
                       <a:r>
                         <a:rPr sz="1100">
                           <a:solidFill>
-                            <a:srgbClr val="334155"/>
+                            <a:srgbClr val="1E3A5F"/>
                           </a:solidFill>
                           <a:latin typeface="Malgun Gothic"/>
                         </a:rPr>
@@ -4277,7 +4277,7 @@
                       <a:r>
                         <a:rPr sz="1100">
                           <a:solidFill>
-                            <a:srgbClr val="334155"/>
+                            <a:srgbClr val="1E3A5F"/>
                           </a:solidFill>
                           <a:latin typeface="Malgun Gothic"/>
                         </a:rPr>
@@ -4299,7 +4299,7 @@
                       <a:r>
                         <a:rPr sz="1100">
                           <a:solidFill>
-                            <a:srgbClr val="334155"/>
+                            <a:srgbClr val="1E3A5F"/>
                           </a:solidFill>
                           <a:latin typeface="Malgun Gothic"/>
                         </a:rPr>
@@ -4321,7 +4321,7 @@
                       <a:r>
                         <a:rPr sz="1100">
                           <a:solidFill>
-                            <a:srgbClr val="334155"/>
+                            <a:srgbClr val="1E3A5F"/>
                           </a:solidFill>
                           <a:latin typeface="Malgun Gothic"/>
                         </a:rPr>
@@ -4343,7 +4343,7 @@
                       <a:r>
                         <a:rPr sz="1100">
                           <a:solidFill>
-                            <a:srgbClr val="334155"/>
+                            <a:srgbClr val="1E3A5F"/>
                           </a:solidFill>
                           <a:latin typeface="Malgun Gothic"/>
                         </a:rPr>
@@ -4365,7 +4365,7 @@
                       <a:r>
                         <a:rPr sz="1100">
                           <a:solidFill>
-                            <a:srgbClr val="334155"/>
+                            <a:srgbClr val="1E3A5F"/>
                           </a:solidFill>
                           <a:latin typeface="Malgun Gothic"/>
                         </a:rPr>
@@ -4389,7 +4389,7 @@
                       <a:r>
                         <a:rPr sz="1100">
                           <a:solidFill>
-                            <a:srgbClr val="334155"/>
+                            <a:srgbClr val="1E3A5F"/>
                           </a:solidFill>
                           <a:latin typeface="Malgun Gothic"/>
                         </a:rPr>
@@ -4411,7 +4411,7 @@
                       <a:r>
                         <a:rPr sz="1100">
                           <a:solidFill>
-                            <a:srgbClr val="334155"/>
+                            <a:srgbClr val="1E3A5F"/>
                           </a:solidFill>
                           <a:latin typeface="Malgun Gothic"/>
                         </a:rPr>
@@ -4433,7 +4433,7 @@
                       <a:r>
                         <a:rPr sz="1100">
                           <a:solidFill>
-                            <a:srgbClr val="334155"/>
+                            <a:srgbClr val="1E3A5F"/>
                           </a:solidFill>
                           <a:latin typeface="Malgun Gothic"/>
                         </a:rPr>
@@ -4455,7 +4455,7 @@
                       <a:r>
                         <a:rPr sz="1100">
                           <a:solidFill>
-                            <a:srgbClr val="334155"/>
+                            <a:srgbClr val="1E3A5F"/>
                           </a:solidFill>
                           <a:latin typeface="Malgun Gothic"/>
                         </a:rPr>
@@ -4477,7 +4477,7 @@
                       <a:r>
                         <a:rPr sz="1100">
                           <a:solidFill>
-                            <a:srgbClr val="334155"/>
+                            <a:srgbClr val="1E3A5F"/>
                           </a:solidFill>
                           <a:latin typeface="Malgun Gothic"/>
                         </a:rPr>
@@ -4501,7 +4501,7 @@
                       <a:r>
                         <a:rPr sz="1100">
                           <a:solidFill>
-                            <a:srgbClr val="334155"/>
+                            <a:srgbClr val="1E3A5F"/>
                           </a:solidFill>
                           <a:latin typeface="Malgun Gothic"/>
                         </a:rPr>
@@ -4523,7 +4523,7 @@
                       <a:r>
                         <a:rPr sz="1100">
                           <a:solidFill>
-                            <a:srgbClr val="334155"/>
+                            <a:srgbClr val="1E3A5F"/>
                           </a:solidFill>
                           <a:latin typeface="Malgun Gothic"/>
                         </a:rPr>
@@ -4545,7 +4545,7 @@
                       <a:r>
                         <a:rPr sz="1100">
                           <a:solidFill>
-                            <a:srgbClr val="334155"/>
+                            <a:srgbClr val="1E3A5F"/>
                           </a:solidFill>
                           <a:latin typeface="Malgun Gothic"/>
                         </a:rPr>
@@ -4567,7 +4567,7 @@
                       <a:r>
                         <a:rPr sz="1100">
                           <a:solidFill>
-                            <a:srgbClr val="334155"/>
+                            <a:srgbClr val="1E3A5F"/>
                           </a:solidFill>
                           <a:latin typeface="Malgun Gothic"/>
                         </a:rPr>
@@ -4589,7 +4589,7 @@
                       <a:r>
                         <a:rPr sz="1100">
                           <a:solidFill>
-                            <a:srgbClr val="334155"/>
+                            <a:srgbClr val="1E3A5F"/>
                           </a:solidFill>
                           <a:latin typeface="Malgun Gothic"/>
                         </a:rPr>
@@ -4613,7 +4613,7 @@
                       <a:r>
                         <a:rPr sz="1100">
                           <a:solidFill>
-                            <a:srgbClr val="334155"/>
+                            <a:srgbClr val="1E3A5F"/>
                           </a:solidFill>
                           <a:latin typeface="Malgun Gothic"/>
                         </a:rPr>
@@ -4635,7 +4635,7 @@
                       <a:r>
                         <a:rPr sz="1100">
                           <a:solidFill>
-                            <a:srgbClr val="334155"/>
+                            <a:srgbClr val="1E3A5F"/>
                           </a:solidFill>
                           <a:latin typeface="Malgun Gothic"/>
                         </a:rPr>
@@ -4657,7 +4657,7 @@
                       <a:r>
                         <a:rPr sz="1100">
                           <a:solidFill>
-                            <a:srgbClr val="334155"/>
+                            <a:srgbClr val="1E3A5F"/>
                           </a:solidFill>
                           <a:latin typeface="Malgun Gothic"/>
                         </a:rPr>
@@ -4679,7 +4679,7 @@
                       <a:r>
                         <a:rPr sz="1100">
                           <a:solidFill>
-                            <a:srgbClr val="334155"/>
+                            <a:srgbClr val="1E3A5F"/>
                           </a:solidFill>
                           <a:latin typeface="Malgun Gothic"/>
                         </a:rPr>
@@ -4701,7 +4701,7 @@
                       <a:r>
                         <a:rPr sz="1100">
                           <a:solidFill>
-                            <a:srgbClr val="334155"/>
+                            <a:srgbClr val="1E3A5F"/>
                           </a:solidFill>
                           <a:latin typeface="Malgun Gothic"/>
                         </a:rPr>
